--- a/prism_jepa_slides.pptx
+++ b/prism_jepa_slides.pptx
@@ -12079,8 +12079,8 @@
         </p:blipFill>
         <p:spPr>
           <a:xfrm>
-            <a:off x="457200" y="1188720"/>
-            <a:ext cx="11247120" cy="3657600"/>
+            <a:off x="274320" y="1097280"/>
+            <a:ext cx="11612880" cy="3383280"/>
           </a:xfrm>
           <a:prstGeom prst="rect">
             <a:avLst/>
@@ -12095,7 +12095,7 @@
         </p:nvSpPr>
         <p:spPr>
           <a:xfrm>
-            <a:off x="457200" y="5029200"/>
+            <a:off x="457200" y="4663440"/>
             <a:ext cx="11338560" cy="5120640"/>
           </a:xfrm>
           <a:prstGeom prst="rect">
@@ -12115,45 +12115,61 @@
               </a:spcAft>
             </a:pPr>
             <a:r>
-              <a:rPr sz="1600">
-                <a:solidFill>
-                  <a:srgbClr val="222222"/>
-                </a:solidFill>
-                <a:latin typeface="Calibri"/>
-              </a:rPr>
-              <a:t>• All three approaches share one limitation:</a:t>
-            </a:r>
-          </a:p>
-          <a:p>
-            <a:pPr lvl="1">
-              <a:spcAft>
-                <a:spcPts val="600"/>
-              </a:spcAft>
-            </a:pPr>
-            <a:r>
               <a:rPr sz="1400">
                 <a:solidFill>
-                  <a:srgbClr val="777777"/>
-                </a:solidFill>
-                <a:latin typeface="Calibri"/>
-              </a:rPr>
-              <a:t>▸ they replace only the mean — and discard how confident the demonstration is at this state.</a:t>
-            </a:r>
-          </a:p>
-          <a:p>
-            <a:pPr>
-              <a:spcAft>
-                <a:spcPts val="600"/>
-              </a:spcAft>
-            </a:pPr>
-            <a:r>
-              <a:rPr sz="1600">
-                <a:solidFill>
-                  <a:srgbClr val="222222"/>
-                </a:solidFill>
-                <a:latin typeface="Calibri"/>
-              </a:rPr>
-              <a:t>• But that confidence is exactly what matters for a sampling distribution.</a:t>
+                  <a:srgbClr val="222222"/>
+                </a:solidFill>
+                <a:latin typeface="Calibri"/>
+              </a:rPr>
+              <a:t>• Vanilla MPPI: sample from N(0, σ²I).  Zero-mean default — no demo info, no warm-start.</a:t>
+            </a:r>
+          </a:p>
+          <a:p>
+            <a:pPr>
+              <a:spcAft>
+                <a:spcPts val="600"/>
+              </a:spcAft>
+            </a:pPr>
+            <a:r>
+              <a:rPr sz="1400">
+                <a:solidFill>
+                  <a:srgbClr val="222222"/>
+                </a:solidFill>
+                <a:latin typeface="Calibri"/>
+              </a:rPr>
+              <a:t>• Warm-start MPPI: sample from N(μ_prev, σ²I).  μ_prev = previous step's planner solution rolled forward.</a:t>
+            </a:r>
+          </a:p>
+          <a:p>
+            <a:pPr>
+              <a:spcAft>
+                <a:spcPts val="600"/>
+              </a:spcAft>
+            </a:pPr>
+            <a:r>
+              <a:rPr sz="1400">
+                <a:solidFill>
+                  <a:srgbClr val="222222"/>
+                </a:solidFill>
+                <a:latin typeface="Calibri"/>
+              </a:rPr>
+              <a:t>• Demo / policy prior (PiJEPA, VLMPC): sample from N(μ_p, σ²I).  μ_p from a learned prior;  σ_p IS DISCARDED.</a:t>
+            </a:r>
+          </a:p>
+          <a:p>
+            <a:pPr>
+              <a:spcAft>
+                <a:spcPts val="600"/>
+              </a:spcAft>
+            </a:pPr>
+            <a:r>
+              <a:rPr sz="1400">
+                <a:solidFill>
+                  <a:srgbClr val="222222"/>
+                </a:solidFill>
+                <a:latin typeface="Calibri"/>
+              </a:rPr>
+              <a:t>• → Differ only in WHERE μ is placed.  σ is always the planner's fixed default.</a:t>
             </a:r>
           </a:p>
         </p:txBody>

--- a/prism_jepa_slides.pptx
+++ b/prism_jepa_slides.pptx
@@ -12079,8 +12079,8 @@
         </p:blipFill>
         <p:spPr>
           <a:xfrm>
-            <a:off x="274320" y="1097280"/>
-            <a:ext cx="11612880" cy="3383280"/>
+            <a:off x="1280160" y="1097280"/>
+            <a:ext cx="9601200" cy="3383280"/>
           </a:xfrm>
           <a:prstGeom prst="rect">
             <a:avLst/>
@@ -12121,7 +12121,7 @@
                 </a:solidFill>
                 <a:latin typeface="Calibri"/>
               </a:rPr>
-              <a:t>• Vanilla MPPI: sample from N(0, σ²I).  Zero-mean default — no demo info, no warm-start.</a:t>
+              <a:t>• Vanilla MPPI: sample from N(0, σ²I).  Zero-mean default; no demo info.</a:t>
             </a:r>
           </a:p>
           <a:p>
@@ -12137,7 +12137,39 @@
                 </a:solidFill>
                 <a:latin typeface="Calibri"/>
               </a:rPr>
-              <a:t>• Warm-start MPPI: sample from N(μ_prev, σ²I).  μ_prev = previous step's planner solution rolled forward.</a:t>
+              <a:t>• Warm-start MPPI: sample from N(μ_p, σ²I).  Inject the prior's mean; keep the planner's σ.</a:t>
+            </a:r>
+          </a:p>
+          <a:p>
+            <a:pPr lvl="1">
+              <a:spcAft>
+                <a:spcPts val="600"/>
+              </a:spcAft>
+            </a:pPr>
+            <a:r>
+              <a:rPr sz="1200">
+                <a:solidFill>
+                  <a:srgbClr val="777777"/>
+                </a:solidFill>
+                <a:latin typeface="Calibri"/>
+              </a:rPr>
+              <a:t>▸ This is what PiJEPA, VLMPC, and our paper's 'warm-start MPPI' baseline do.</a:t>
+            </a:r>
+          </a:p>
+          <a:p>
+            <a:pPr lvl="1">
+              <a:spcAft>
+                <a:spcPts val="600"/>
+              </a:spcAft>
+            </a:pPr>
+            <a:r>
+              <a:rPr sz="1200">
+                <a:solidFill>
+                  <a:srgbClr val="777777"/>
+                </a:solidFill>
+                <a:latin typeface="Calibri"/>
+              </a:rPr>
+              <a:t>▸ σ_p (the prior's own confidence) is thrown away even though it was computed.</a:t>
             </a:r>
           </a:p>
           <a:p>
@@ -12153,23 +12185,23 @@
                 </a:solidFill>
                 <a:latin typeface="Calibri"/>
               </a:rPr>
-              <a:t>• Demo / policy prior (PiJEPA, VLMPC): sample from N(μ_p, σ²I).  μ_p from a learned prior;  σ_p IS DISCARDED.</a:t>
-            </a:r>
-          </a:p>
-          <a:p>
-            <a:pPr>
-              <a:spcAft>
-                <a:spcPts val="600"/>
-              </a:spcAft>
-            </a:pPr>
-            <a:r>
-              <a:rPr sz="1400">
-                <a:solidFill>
-                  <a:srgbClr val="222222"/>
-                </a:solidFill>
-                <a:latin typeface="Calibri"/>
-              </a:rPr>
-              <a:t>• → Differ only in WHERE μ is placed.  σ is always the planner's fixed default.</a:t>
+              <a:t>• Aside: classical MPC also has temporal warm-start (μ ← μ_prev, last step's plan rolled forward).</a:t>
+            </a:r>
+          </a:p>
+          <a:p>
+            <a:pPr lvl="1">
+              <a:spcAft>
+                <a:spcPts val="600"/>
+              </a:spcAft>
+            </a:pPr>
+            <a:r>
+              <a:rPr sz="1200">
+                <a:solidFill>
+                  <a:srgbClr val="777777"/>
+                </a:solidFill>
+                <a:latin typeface="Calibri"/>
+              </a:rPr>
+              <a:t>▸ Universal trick, orthogonal to demo priors; not what we mean by 'warm-start MPPI' here.</a:t>
             </a:r>
           </a:p>
         </p:txBody>

--- a/prism_jepa_slides.pptx
+++ b/prism_jepa_slides.pptx
@@ -3895,7 +3895,7 @@
                 </a:solidFill>
                 <a:latin typeface="Calibri"/>
               </a:rPr>
-              <a:t>PiJEPA — closest substrate, different fusion</a:t>
+              <a:t>PiJEPA — closest substrate, replacement vs fusion</a:t>
             </a:r>
           </a:p>
         </p:txBody>
@@ -3908,7 +3908,477 @@
         </p:nvSpPr>
         <p:spPr>
           <a:xfrm>
-            <a:off x="457200" y="1188720"/>
+            <a:off x="365760" y="777240"/>
+            <a:ext cx="11521440" cy="365760"/>
+          </a:xfrm>
+          <a:prstGeom prst="rect">
+            <a:avLst/>
+          </a:prstGeom>
+          <a:noFill/>
+        </p:spPr>
+        <p:txBody>
+          <a:bodyPr wrap="none">
+            <a:spAutoFit/>
+          </a:bodyPr>
+          <a:lstStyle/>
+          <a:p>
+            <a:pPr algn="l"/>
+            <a:r>
+              <a:rPr sz="1400" b="0" i="1">
+                <a:solidFill>
+                  <a:srgbClr val="777777"/>
+                </a:solidFill>
+                <a:latin typeface="Calibri"/>
+              </a:rPr>
+              <a:t>Chahe &amp; Zhou 2026.03 (Drexel) — JEPA + MPPI for language-conditioned visual navigation</a:t>
+            </a:r>
+          </a:p>
+        </p:txBody>
+      </p:sp>
+      <p:graphicFrame>
+        <p:nvGraphicFramePr>
+          <p:cNvPr id="4" name="Table 3"/>
+          <p:cNvGraphicFramePr>
+            <a:graphicFrameLocks noGrp="1"/>
+          </p:cNvGraphicFramePr>
+          <p:nvPr/>
+        </p:nvGraphicFramePr>
+        <p:xfrm>
+          <a:off x="365760" y="1463040"/>
+          <a:ext cx="11430000" cy="4297680"/>
+        </p:xfrm>
+        <a:graphic>
+          <a:graphicData uri="http://schemas.openxmlformats.org/drawingml/2006/table">
+            <a:tbl>
+              <a:tblPr firstRow="1" bandRow="1">
+                <a:tableStyleId>{5C22544A-7EE6-4342-B048-85BDC9FD1C3A}</a:tableStyleId>
+              </a:tblPr>
+              <a:tblGrid>
+                <a:gridCol w="2743200"/>
+                <a:gridCol w="4114800"/>
+                <a:gridCol w="4572000"/>
+              </a:tblGrid>
+              <a:tr h="537210">
+                <a:tc>
+                  <a:txBody>
+                    <a:bodyPr/>
+                    <a:lstStyle/>
+                    <a:p>
+                      <a:r>
+                        <a:rPr b="1" sz="1300">
+                          <a:solidFill>
+                            <a:srgbClr val="FFFFFF"/>
+                          </a:solidFill>
+                        </a:rPr>
+                        <a:t>Aspect</a:t>
+                      </a:r>
+                    </a:p>
+                  </a:txBody>
+                  <a:tcPr>
+                    <a:solidFill>
+                      <a:srgbClr val="1F4E79"/>
+                    </a:solidFill>
+                  </a:tcPr>
+                </a:tc>
+                <a:tc>
+                  <a:txBody>
+                    <a:bodyPr/>
+                    <a:lstStyle/>
+                    <a:p>
+                      <a:r>
+                        <a:rPr b="1" sz="1300">
+                          <a:solidFill>
+                            <a:srgbClr val="FFFFFF"/>
+                          </a:solidFill>
+                        </a:rPr>
+                        <a:t>PiJEPA</a:t>
+                      </a:r>
+                    </a:p>
+                  </a:txBody>
+                  <a:tcPr>
+                    <a:solidFill>
+                      <a:srgbClr val="1F4E79"/>
+                    </a:solidFill>
+                  </a:tcPr>
+                </a:tc>
+                <a:tc>
+                  <a:txBody>
+                    <a:bodyPr/>
+                    <a:lstStyle/>
+                    <a:p>
+                      <a:r>
+                        <a:rPr b="1" sz="1300">
+                          <a:solidFill>
+                            <a:srgbClr val="FFFFFF"/>
+                          </a:solidFill>
+                        </a:rPr>
+                        <a:t>PRISM (ours)</a:t>
+                      </a:r>
+                    </a:p>
+                  </a:txBody>
+                  <a:tcPr>
+                    <a:solidFill>
+                      <a:srgbClr val="2E7D32"/>
+                    </a:solidFill>
+                  </a:tcPr>
+                </a:tc>
+              </a:tr>
+              <a:tr h="537210">
+                <a:tc>
+                  <a:txBody>
+                    <a:bodyPr/>
+                    <a:lstStyle/>
+                    <a:p>
+                      <a:r>
+                        <a:rPr sz="1100" b="1">
+                          <a:solidFill>
+                            <a:srgbClr val="5B6770"/>
+                          </a:solidFill>
+                        </a:rPr>
+                        <a:t>Prior architecture</a:t>
+                      </a:r>
+                    </a:p>
+                  </a:txBody>
+                  <a:tcPr/>
+                </a:tc>
+                <a:tc>
+                  <a:txBody>
+                    <a:bodyPr/>
+                    <a:lstStyle/>
+                    <a:p>
+                      <a:r>
+                        <a:rPr sz="1100"/>
+                        <a:t>fine-tuned Octo diffusion policy</a:t>
+                      </a:r>
+                    </a:p>
+                  </a:txBody>
+                  <a:tcPr/>
+                </a:tc>
+                <a:tc>
+                  <a:txBody>
+                    <a:bodyPr/>
+                    <a:lstStyle/>
+                    <a:p>
+                      <a:r>
+                        <a:rPr sz="1100">
+                          <a:solidFill>
+                            <a:srgbClr val="2E7D32"/>
+                          </a:solidFill>
+                        </a:rPr>
+                        <a:t>0.5M MLP head on cached JEPA features</a:t>
+                      </a:r>
+                    </a:p>
+                  </a:txBody>
+                  <a:tcPr/>
+                </a:tc>
+              </a:tr>
+              <a:tr h="537210">
+                <a:tc>
+                  <a:txBody>
+                    <a:bodyPr/>
+                    <a:lstStyle/>
+                    <a:p>
+                      <a:r>
+                        <a:rPr sz="1100" b="1">
+                          <a:solidFill>
+                            <a:srgbClr val="5B6770"/>
+                          </a:solidFill>
+                        </a:rPr>
+                        <a:t>Inference cost per env step</a:t>
+                      </a:r>
+                    </a:p>
+                  </a:txBody>
+                  <a:tcPr/>
+                </a:tc>
+                <a:tc>
+                  <a:txBody>
+                    <a:bodyPr/>
+                    <a:lstStyle/>
+                    <a:p>
+                      <a:r>
+                        <a:rPr sz="1100"/>
+                        <a:t>N_π diffusion-policy forwards (slow)</a:t>
+                      </a:r>
+                    </a:p>
+                  </a:txBody>
+                  <a:tcPr/>
+                </a:tc>
+                <a:tc>
+                  <a:txBody>
+                    <a:bodyPr/>
+                    <a:lstStyle/>
+                    <a:p>
+                      <a:r>
+                        <a:rPr sz="1100">
+                          <a:solidFill>
+                            <a:srgbClr val="2E7D32"/>
+                          </a:solidFill>
+                        </a:rPr>
+                        <a:t>1 MLP forward (~ms)</a:t>
+                      </a:r>
+                    </a:p>
+                  </a:txBody>
+                  <a:tcPr/>
+                </a:tc>
+              </a:tr>
+              <a:tr h="537210">
+                <a:tc>
+                  <a:txBody>
+                    <a:bodyPr/>
+                    <a:lstStyle/>
+                    <a:p>
+                      <a:r>
+                        <a:rPr sz="1100" b="1">
+                          <a:solidFill>
+                            <a:srgbClr val="5B6770"/>
+                          </a:solidFill>
+                        </a:rPr>
+                        <a:t>Prior σ source</a:t>
+                      </a:r>
+                    </a:p>
+                  </a:txBody>
+                  <a:tcPr/>
+                </a:tc>
+                <a:tc>
+                  <a:txBody>
+                    <a:bodyPr/>
+                    <a:lstStyle/>
+                    <a:p>
+                      <a:r>
+                        <a:rPr sz="1100"/>
+                        <a:t>empirical std of N_π samples</a:t>
+                      </a:r>
+                    </a:p>
+                  </a:txBody>
+                  <a:tcPr/>
+                </a:tc>
+                <a:tc>
+                  <a:txBody>
+                    <a:bodyPr/>
+                    <a:lstStyle/>
+                    <a:p>
+                      <a:r>
+                        <a:rPr sz="1100">
+                          <a:solidFill>
+                            <a:srgbClr val="2E7D32"/>
+                          </a:solidFill>
+                        </a:rPr>
+                        <a:t>direct MLP output, β-NLL trained</a:t>
+                      </a:r>
+                    </a:p>
+                  </a:txBody>
+                  <a:tcPr/>
+                </a:tc>
+              </a:tr>
+              <a:tr h="537210">
+                <a:tc>
+                  <a:txBody>
+                    <a:bodyPr/>
+                    <a:lstStyle/>
+                    <a:p>
+                      <a:r>
+                        <a:rPr sz="1100" b="1">
+                          <a:solidFill>
+                            <a:srgbClr val="5B6770"/>
+                          </a:solidFill>
+                        </a:rPr>
+                        <a:t>How prior meets MPPI seed</a:t>
+                      </a:r>
+                    </a:p>
+                  </a:txBody>
+                  <a:tcPr/>
+                </a:tc>
+                <a:tc>
+                  <a:txBody>
+                    <a:bodyPr/>
+                    <a:lstStyle/>
+                    <a:p>
+                      <a:r>
+                        <a:rPr sz="1100"/>
+                        <a:t>REPLACES:  (μ⁰, σ⁰)  →  MPPI init</a:t>
+                      </a:r>
+                    </a:p>
+                  </a:txBody>
+                  <a:tcPr/>
+                </a:tc>
+                <a:tc>
+                  <a:txBody>
+                    <a:bodyPr/>
+                    <a:lstStyle/>
+                    <a:p>
+                      <a:r>
+                        <a:rPr sz="1100">
+                          <a:solidFill>
+                            <a:srgbClr val="2E7D32"/>
+                          </a:solidFill>
+                        </a:rPr>
+                        <a:t>FUSES via closed-form PoG with (μ_π, σ_π)</a:t>
+                      </a:r>
+                    </a:p>
+                  </a:txBody>
+                  <a:tcPr/>
+                </a:tc>
+              </a:tr>
+              <a:tr h="537210">
+                <a:tc>
+                  <a:txBody>
+                    <a:bodyPr/>
+                    <a:lstStyle/>
+                    <a:p>
+                      <a:r>
+                        <a:rPr sz="1100" b="1">
+                          <a:solidFill>
+                            <a:srgbClr val="5B6770"/>
+                          </a:solidFill>
+                        </a:rPr>
+                        <a:t>Asymptote when prior uninformative</a:t>
+                      </a:r>
+                    </a:p>
+                  </a:txBody>
+                  <a:tcPr/>
+                </a:tc>
+                <a:tc>
+                  <a:txBody>
+                    <a:bodyPr/>
+                    <a:lstStyle/>
+                    <a:p>
+                      <a:r>
+                        <a:rPr sz="1100"/>
+                        <a:t>no fallback (always replaces)</a:t>
+                      </a:r>
+                    </a:p>
+                  </a:txBody>
+                  <a:tcPr/>
+                </a:tc>
+                <a:tc>
+                  <a:txBody>
+                    <a:bodyPr/>
+                    <a:lstStyle/>
+                    <a:p>
+                      <a:r>
+                        <a:rPr sz="1100">
+                          <a:solidFill>
+                            <a:srgbClr val="2E7D32"/>
+                          </a:solidFill>
+                        </a:rPr>
+                        <a:t>σ_p → ∞   ⇒   vanilla MPPI exactly</a:t>
+                      </a:r>
+                    </a:p>
+                  </a:txBody>
+                  <a:tcPr/>
+                </a:tc>
+              </a:tr>
+              <a:tr h="537210">
+                <a:tc>
+                  <a:txBody>
+                    <a:bodyPr/>
+                    <a:lstStyle/>
+                    <a:p>
+                      <a:r>
+                        <a:rPr sz="1100" b="1">
+                          <a:solidFill>
+                            <a:srgbClr val="5B6770"/>
+                          </a:solidFill>
+                        </a:rPr>
+                        <a:t>σ refit during MPPI iterations</a:t>
+                      </a:r>
+                    </a:p>
+                  </a:txBody>
+                  <a:tcPr/>
+                </a:tc>
+                <a:tc>
+                  <a:txBody>
+                    <a:bodyPr/>
+                    <a:lstStyle/>
+                    <a:p>
+                      <a:r>
+                        <a:rPr sz="1100"/>
+                        <a:t>yes (CEM-style, Alg. line 21)</a:t>
+                      </a:r>
+                    </a:p>
+                  </a:txBody>
+                  <a:tcPr/>
+                </a:tc>
+                <a:tc>
+                  <a:txBody>
+                    <a:bodyPr/>
+                    <a:lstStyle/>
+                    <a:p>
+                      <a:r>
+                        <a:rPr sz="1100">
+                          <a:solidFill>
+                            <a:srgbClr val="2E7D32"/>
+                          </a:solidFill>
+                        </a:rPr>
+                        <a:t>no (LeWM substrate);  σ_fused persists</a:t>
+                      </a:r>
+                    </a:p>
+                  </a:txBody>
+                  <a:tcPr/>
+                </a:tc>
+              </a:tr>
+              <a:tr h="537210">
+                <a:tc>
+                  <a:txBody>
+                    <a:bodyPr/>
+                    <a:lstStyle/>
+                    <a:p>
+                      <a:r>
+                        <a:rPr sz="1100" b="1">
+                          <a:solidFill>
+                            <a:srgbClr val="5B6770"/>
+                          </a:solidFill>
+                        </a:rPr>
+                        <a:t>Task domain</a:t>
+                      </a:r>
+                    </a:p>
+                  </a:txBody>
+                  <a:tcPr/>
+                </a:tc>
+                <a:tc>
+                  <a:txBody>
+                    <a:bodyPr/>
+                    <a:lstStyle/>
+                    <a:p>
+                      <a:r>
+                        <a:rPr sz="1100"/>
+                        <a:t>visual navigation</a:t>
+                      </a:r>
+                    </a:p>
+                  </a:txBody>
+                  <a:tcPr/>
+                </a:tc>
+                <a:tc>
+                  <a:txBody>
+                    <a:bodyPr/>
+                    <a:lstStyle/>
+                    <a:p>
+                      <a:r>
+                        <a:rPr sz="1100">
+                          <a:solidFill>
+                            <a:srgbClr val="2E7D32"/>
+                          </a:solidFill>
+                        </a:rPr>
+                        <a:t>visual manipulation</a:t>
+                      </a:r>
+                    </a:p>
+                  </a:txBody>
+                  <a:tcPr/>
+                </a:tc>
+              </a:tr>
+            </a:tbl>
+          </a:graphicData>
+        </a:graphic>
+      </p:graphicFrame>
+      <p:sp>
+        <p:nvSpPr>
+          <p:cNvPr id="5" name="TextBox 4"/>
+          <p:cNvSpPr txBox="1"/>
+          <p:nvPr/>
+        </p:nvSpPr>
+        <p:spPr>
+          <a:xfrm>
+            <a:off x="457200" y="5943600"/>
             <a:ext cx="11338560" cy="5120640"/>
           </a:xfrm>
           <a:prstGeom prst="rect">
@@ -3928,116 +4398,20 @@
               </a:spcAft>
             </a:pPr>
             <a:r>
-              <a:rPr sz="1800">
-                <a:solidFill>
-                  <a:srgbClr val="222222"/>
-                </a:solidFill>
-                <a:latin typeface="Calibri"/>
-              </a:rPr>
-              <a:t>• Chahe &amp; Zhou 2026.03 (Drexel): JEPA-based world-model planning + MPPI + a fine-tuned Octo policy as prior.</a:t>
-            </a:r>
-          </a:p>
-          <a:p>
-            <a:pPr>
-              <a:spcAft>
-                <a:spcPts val="600"/>
-              </a:spcAft>
-            </a:pPr>
-            <a:r>
-              <a:rPr sz="1800">
-                <a:solidFill>
-                  <a:srgbClr val="222222"/>
-                </a:solidFill>
-                <a:latin typeface="Calibri"/>
-              </a:rPr>
-              <a:t>• Same JEPA + MPPI substrate as us. Different fusion.</a:t>
-            </a:r>
-          </a:p>
-          <a:p>
-            <a:pPr>
-              <a:spcAft>
-                <a:spcPts val="600"/>
-              </a:spcAft>
-            </a:pPr>
-            <a:r>
-              <a:rPr sz="1800">
-                <a:solidFill>
-                  <a:srgbClr val="222222"/>
-                </a:solidFill>
-                <a:latin typeface="Calibri"/>
-              </a:rPr>
-              <a:t>• PiJEPA's choice: warm-start.  μ_MPPI ← μ_policy.  Discards σ_p.</a:t>
-            </a:r>
-          </a:p>
-          <a:p>
-            <a:pPr>
-              <a:spcAft>
-                <a:spcPts val="600"/>
-              </a:spcAft>
-            </a:pPr>
-            <a:r>
-              <a:rPr sz="1800">
-                <a:solidFill>
-                  <a:srgbClr val="222222"/>
-                </a:solidFill>
-                <a:latin typeface="Calibri"/>
-              </a:rPr>
-              <a:t>• Our differentiation, on two complementary axes:</a:t>
-            </a:r>
-          </a:p>
-          <a:p>
-            <a:pPr lvl="1">
-              <a:spcAft>
-                <a:spcPts val="600"/>
-              </a:spcAft>
-            </a:pPr>
-            <a:r>
-              <a:rPr sz="1600">
-                <a:solidFill>
-                  <a:srgbClr val="777777"/>
-                </a:solidFill>
-                <a:latin typeface="Calibri"/>
-              </a:rPr>
-              <a:t>▸ Fusion algebra: PoG retains σ_p, automatic precision weighting, asymptote guarantee.</a:t>
-            </a:r>
-          </a:p>
-          <a:p>
-            <a:pPr lvl="1">
-              <a:spcAft>
-                <a:spcPts val="600"/>
-              </a:spcAft>
-            </a:pPr>
-            <a:r>
-              <a:rPr sz="1600">
-                <a:solidFill>
-                  <a:srgbClr val="777777"/>
-                </a:solidFill>
-                <a:latin typeface="Calibri"/>
-              </a:rPr>
-              <a:t>▸ Task domain: PiJEPA = visual navigation; we = visual manipulation.</a:t>
-            </a:r>
-          </a:p>
-          <a:p>
-            <a:pPr>
-              <a:spcAft>
-                <a:spcPts val="600"/>
-              </a:spcAft>
-            </a:pPr>
-            <a:r>
-              <a:rPr sz="1800">
-                <a:solidFill>
-                  <a:srgbClr val="222222"/>
-                </a:solidFill>
-                <a:latin typeface="Calibri"/>
-              </a:rPr>
-              <a:t>• Our PushT result is a direct empirical case where warm-start would fail and PoG survives.</a:t>
-            </a:r>
-          </a:p>
-        </p:txBody>
-      </p:sp>
-      <p:sp>
-        <p:nvSpPr>
-          <p:cNvPr id="4" name="TextBox 3"/>
+              <a:rPr sz="1300">
+                <a:solidFill>
+                  <a:srgbClr val="222222"/>
+                </a:solidFill>
+                <a:latin typeface="Calibri"/>
+              </a:rPr>
+              <a:t>• Both use μ AND σ from a learned prior. Differences = HOW prior is computed and HOW it meets the planner.</a:t>
+            </a:r>
+          </a:p>
+        </p:txBody>
+      </p:sp>
+      <p:sp>
+        <p:nvSpPr>
+          <p:cNvPr id="6" name="TextBox 5"/>
           <p:cNvSpPr txBox="1"/>
           <p:nvPr/>
         </p:nvSpPr>
@@ -4151,39 +4525,39 @@
               </a:spcAft>
             </a:pPr>
             <a:r>
-              <a:rPr sz="1800">
-                <a:solidFill>
-                  <a:srgbClr val="222222"/>
-                </a:solidFill>
-                <a:latin typeface="Calibri"/>
-              </a:rPr>
-              <a:t>• VLM (e.g. GPT-4V) provides a low-dim Gaussian action prior at every env step.</a:t>
-            </a:r>
-          </a:p>
-          <a:p>
-            <a:pPr>
-              <a:spcAft>
-                <a:spcPts val="600"/>
-              </a:spcAft>
-            </a:pPr>
-            <a:r>
-              <a:rPr sz="1800">
-                <a:solidFill>
-                  <a:srgbClr val="222222"/>
-                </a:solidFill>
-                <a:latin typeface="Calibri"/>
-              </a:rPr>
-              <a:t>• TD-MPC2 + MPPI substrate; mean-only injection.</a:t>
-            </a:r>
-          </a:p>
-          <a:p>
-            <a:pPr>
-              <a:spcAft>
-                <a:spcPts val="600"/>
-              </a:spcAft>
-            </a:pPr>
-            <a:r>
-              <a:rPr sz="1800">
+              <a:rPr sz="1700">
+                <a:solidFill>
+                  <a:srgbClr val="222222"/>
+                </a:solidFill>
+                <a:latin typeface="Calibri"/>
+              </a:rPr>
+              <a:t>• VLM (e.g. GPT-4V) outputs a low-dim Gaussian action mean at every env step; σ is hand-tuned.</a:t>
+            </a:r>
+          </a:p>
+          <a:p>
+            <a:pPr>
+              <a:spcAft>
+                <a:spcPts val="600"/>
+              </a:spcAft>
+            </a:pPr>
+            <a:r>
+              <a:rPr sz="1700">
+                <a:solidFill>
+                  <a:srgbClr val="222222"/>
+                </a:solidFill>
+                <a:latin typeface="Calibri"/>
+              </a:rPr>
+              <a:t>• TD-MPC2 + MPPI substrate; replaces the planner's seed with (μ_VLM, σ_handset).</a:t>
+            </a:r>
+          </a:p>
+          <a:p>
+            <a:pPr>
+              <a:spcAft>
+                <a:spcPts val="600"/>
+              </a:spcAft>
+            </a:pPr>
+            <a:r>
+              <a:rPr sz="1700">
                 <a:solidFill>
                   <a:srgbClr val="222222"/>
                 </a:solidFill>
@@ -4199,7 +4573,7 @@
               </a:spcAft>
             </a:pPr>
             <a:r>
-              <a:rPr sz="1800">
+              <a:rPr sz="1700">
                 <a:solidFill>
                   <a:srgbClr val="222222"/>
                 </a:solidFill>
@@ -4215,13 +4589,13 @@
               </a:spcAft>
             </a:pPr>
             <a:r>
-              <a:rPr sz="1600">
+              <a:rPr sz="1500">
                 <a:solidFill>
                   <a:srgbClr val="777777"/>
                 </a:solidFill>
                 <a:latin typeface="Calibri"/>
               </a:rPr>
-              <a:t>▸ σ — VLMPC hand-sets it; we learn it via β-NLL.</a:t>
+              <a:t>▸ σ source — VLMPC hand-sets it (not state-conditional); PRISM learns it via β-NLL on demos.</a:t>
             </a:r>
           </a:p>
           <a:p>
@@ -4231,13 +4605,13 @@
               </a:spcAft>
             </a:pPr>
             <a:r>
-              <a:rPr sz="1600">
+              <a:rPr sz="1500">
                 <a:solidFill>
                   <a:srgbClr val="777777"/>
                 </a:solidFill>
                 <a:latin typeface="Calibri"/>
               </a:rPr>
-              <a:t>▸ Compute — VLMPC calls VLM each env step (heavy); we use a 0.5M MLP on cached JEPA features.</a:t>
+              <a:t>▸ Compute — VLMPC calls VLM each env step (heavy); PRISM uses a 0.5M MLP on cached JEPA features.</a:t>
             </a:r>
           </a:p>
           <a:p>
@@ -4247,23 +4621,23 @@
               </a:spcAft>
             </a:pPr>
             <a:r>
-              <a:rPr sz="1600">
+              <a:rPr sz="1500">
                 <a:solidFill>
                   <a:srgbClr val="777777"/>
                 </a:solidFill>
                 <a:latin typeface="Calibri"/>
               </a:rPr>
-              <a:t>▸ Fusion — VLMPC drops σ; we contribute closed-form Gaussian fusion.</a:t>
-            </a:r>
-          </a:p>
-          <a:p>
-            <a:pPr>
-              <a:spcAft>
-                <a:spcPts val="600"/>
-              </a:spcAft>
-            </a:pPr>
-            <a:r>
-              <a:rPr sz="1800">
+              <a:t>▸ Combination — VLMPC replaces seed; PRISM fuses with planner default via closed-form PoG (asymptote guarantee).</a:t>
+            </a:r>
+          </a:p>
+          <a:p>
+            <a:pPr>
+              <a:spcAft>
+                <a:spcPts val="600"/>
+              </a:spcAft>
+            </a:pPr>
+            <a:r>
+              <a:rPr sz="1700">
                 <a:solidFill>
                   <a:srgbClr val="222222"/>
                 </a:solidFill>
@@ -4629,13 +5003,13 @@
               </a:spcAft>
             </a:pPr>
             <a:r>
-              <a:rPr sz="1700">
-                <a:solidFill>
-                  <a:srgbClr val="222222"/>
-                </a:solidFill>
-                <a:latin typeface="Calibri"/>
-              </a:rPr>
-              <a:t>• Mean-only injection (warm-start, PiJEPA, VLMPC):</a:t>
+              <a:rPr sz="1500">
+                <a:solidFill>
+                  <a:srgbClr val="222222"/>
+                </a:solidFill>
+                <a:latin typeface="Calibri"/>
+              </a:rPr>
+              <a:t>• Replacement-style prior injection (warm-start, PiJEPA, VLMPC):</a:t>
             </a:r>
           </a:p>
           <a:p>
@@ -4645,13 +5019,109 @@
               </a:spcAft>
             </a:pPr>
             <a:r>
+              <a:rPr sz="1300">
+                <a:solidFill>
+                  <a:srgbClr val="777777"/>
+                </a:solidFill>
+                <a:latin typeface="Calibri"/>
+              </a:rPr>
+              <a:t>▸ Prior overwrites the planner's seed entirely. Different methods compute the prior differently:</a:t>
+            </a:r>
+          </a:p>
+          <a:p>
+            <a:pPr lvl="1">
+              <a:spcAft>
+                <a:spcPts val="600"/>
+              </a:spcAft>
+            </a:pPr>
+            <a:r>
+              <a:rPr sz="1300">
+                <a:solidFill>
+                  <a:srgbClr val="777777"/>
+                </a:solidFill>
+                <a:latin typeface="Calibri"/>
+              </a:rPr>
+              <a:t>▸ VLMPC: μ_p from VLM, σ hand-set.  Warm-start MPPI / our ablation: μ_p from MLP, σ_p discarded.</a:t>
+            </a:r>
+          </a:p>
+          <a:p>
+            <a:pPr lvl="1">
+              <a:spcAft>
+                <a:spcPts val="600"/>
+              </a:spcAft>
+            </a:pPr>
+            <a:r>
+              <a:rPr sz="1300">
+                <a:solidFill>
+                  <a:srgbClr val="777777"/>
+                </a:solidFill>
+                <a:latin typeface="Calibri"/>
+              </a:rPr>
+              <a:t>▸ PiJEPA: empirical (μ^0, σ^0) from N_π diffusion-policy samples (uses σ, but still replaces planner default).</a:t>
+            </a:r>
+          </a:p>
+          <a:p>
+            <a:pPr lvl="1">
+              <a:spcAft>
+                <a:spcPts val="600"/>
+              </a:spcAft>
+            </a:pPr>
+            <a:r>
+              <a:rPr sz="1300">
+                <a:solidFill>
+                  <a:srgbClr val="777777"/>
+                </a:solidFill>
+                <a:latin typeface="Calibri"/>
+              </a:rPr>
+              <a:t>▸ Common limitation: NO asymptote guarantee — even an uninformative prior overwrites the seed.</a:t>
+            </a:r>
+          </a:p>
+          <a:p>
+            <a:pPr>
+              <a:spcAft>
+                <a:spcPts val="600"/>
+              </a:spcAft>
+            </a:pPr>
+            <a:r>
               <a:rPr sz="1500">
                 <a:solidFill>
+                  <a:srgbClr val="222222"/>
+                </a:solidFill>
+                <a:latin typeface="Calibri"/>
+              </a:rPr>
+              <a:t>• KL-bias / importance-sampling general (Biased-MPPI):</a:t>
+            </a:r>
+          </a:p>
+          <a:p>
+            <a:pPr lvl="1">
+              <a:spcAft>
+                <a:spcPts val="600"/>
+              </a:spcAft>
+            </a:pPr>
+            <a:r>
+              <a:rPr sz="1300">
+                <a:solidFill>
                   <a:srgbClr val="777777"/>
                 </a:solidFill>
                 <a:latin typeface="Calibri"/>
               </a:rPr>
-              <a:t>▸ Simple. Gracefully passes when prior is good. Fails when prior μ is bad.</a:t>
+              <a:t>▸ Mathematically general but no closed-form Gaussian instance. Low-dim state-space evaluation only.</a:t>
+            </a:r>
+          </a:p>
+          <a:p>
+            <a:pPr>
+              <a:spcAft>
+                <a:spcPts val="600"/>
+              </a:spcAft>
+            </a:pPr>
+            <a:r>
+              <a:rPr sz="1500">
+                <a:solidFill>
+                  <a:srgbClr val="222222"/>
+                </a:solidFill>
+                <a:latin typeface="Calibri"/>
+              </a:rPr>
+              <a:t>• PRISM-PoG (ours):</a:t>
             </a:r>
           </a:p>
           <a:p>
@@ -4661,29 +5131,13 @@
               </a:spcAft>
             </a:pPr>
             <a:r>
-              <a:rPr sz="1500">
+              <a:rPr sz="1300">
                 <a:solidFill>
                   <a:srgbClr val="777777"/>
                 </a:solidFill>
                 <a:latin typeface="Calibri"/>
               </a:rPr>
-              <a:t>▸ No σ-handling, no asymptote guarantee.</a:t>
-            </a:r>
-          </a:p>
-          <a:p>
-            <a:pPr>
-              <a:spcAft>
-                <a:spcPts val="600"/>
-              </a:spcAft>
-            </a:pPr>
-            <a:r>
-              <a:rPr sz="1700">
-                <a:solidFill>
-                  <a:srgbClr val="222222"/>
-                </a:solidFill>
-                <a:latin typeface="Calibri"/>
-              </a:rPr>
-              <a:t>• KL-bias / importance-sampling general (Biased-MPPI):</a:t>
+              <a:t>▸ Closed-form Gaussian fusion (NOT replacement) of planner default with learned prior.</a:t>
             </a:r>
           </a:p>
           <a:p>
@@ -4693,13 +5147,13 @@
               </a:spcAft>
             </a:pPr>
             <a:r>
-              <a:rPr sz="1500">
+              <a:rPr sz="1300">
                 <a:solidFill>
                   <a:srgbClr val="777777"/>
                 </a:solidFill>
                 <a:latin typeface="Calibri"/>
               </a:rPr>
-              <a:t>▸ Mathematically general but no closed-form Gaussian instance.</a:t>
+              <a:t>▸ Asymptote guarantee for free.  Per-state precision weighting from the head's own σ_p.</a:t>
             </a:r>
           </a:p>
           <a:p>
@@ -4709,93 +5163,13 @@
               </a:spcAft>
             </a:pPr>
             <a:r>
-              <a:rPr sz="1500">
+              <a:rPr sz="1300">
                 <a:solidFill>
                   <a:srgbClr val="777777"/>
                 </a:solidFill>
                 <a:latin typeface="Calibri"/>
               </a:rPr>
-              <a:t>▸ Evaluated only on low-dim state-space.</a:t>
-            </a:r>
-          </a:p>
-          <a:p>
-            <a:pPr>
-              <a:spcAft>
-                <a:spcPts val="600"/>
-              </a:spcAft>
-            </a:pPr>
-            <a:r>
-              <a:rPr sz="1700">
-                <a:solidFill>
-                  <a:srgbClr val="222222"/>
-                </a:solidFill>
-                <a:latin typeface="Calibri"/>
-              </a:rPr>
-              <a:t>• PRISM-PoG (ours):</a:t>
-            </a:r>
-          </a:p>
-          <a:p>
-            <a:pPr lvl="1">
-              <a:spcAft>
-                <a:spcPts val="600"/>
-              </a:spcAft>
-            </a:pPr>
-            <a:r>
-              <a:rPr sz="1500">
-                <a:solidFill>
-                  <a:srgbClr val="777777"/>
-                </a:solidFill>
-                <a:latin typeface="Calibri"/>
-              </a:rPr>
-              <a:t>▸ Closed-form Gaussian fusion.</a:t>
-            </a:r>
-          </a:p>
-          <a:p>
-            <a:pPr lvl="1">
-              <a:spcAft>
-                <a:spcPts val="600"/>
-              </a:spcAft>
-            </a:pPr>
-            <a:r>
-              <a:rPr sz="1500">
-                <a:solidFill>
-                  <a:srgbClr val="777777"/>
-                </a:solidFill>
-                <a:latin typeface="Calibri"/>
-              </a:rPr>
-              <a:t>▸ Asymptote guarantee for free.</a:t>
-            </a:r>
-          </a:p>
-          <a:p>
-            <a:pPr lvl="1">
-              <a:spcAft>
-                <a:spcPts val="600"/>
-              </a:spcAft>
-            </a:pPr>
-            <a:r>
-              <a:rPr sz="1500">
-                <a:solidFill>
-                  <a:srgbClr val="777777"/>
-                </a:solidFill>
-                <a:latin typeface="Calibri"/>
-              </a:rPr>
-              <a:t>▸ Per-state precision weighting from the head's own σ_p.</a:t>
-            </a:r>
-          </a:p>
-          <a:p>
-            <a:pPr lvl="1">
-              <a:spcAft>
-                <a:spcPts val="600"/>
-              </a:spcAft>
-            </a:pPr>
-            <a:r>
-              <a:rPr sz="1500">
-                <a:solidFill>
-                  <a:srgbClr val="777777"/>
-                </a:solidFill>
-                <a:latin typeface="Calibri"/>
-              </a:rPr>
-              <a:t>▸ Empirically validates on visual manipulation across two very different sims.</a:t>
+              <a:t>▸ Parameter-efficient prior (~0.5M MLP, no diffusion sampling at inference).</a:t>
             </a:r>
           </a:p>
         </p:txBody>
@@ -12153,7 +12527,7 @@
                 </a:solidFill>
                 <a:latin typeface="Calibri"/>
               </a:rPr>
-              <a:t>▸ This is what PiJEPA, VLMPC, and our paper's 'warm-start MPPI' baseline do.</a:t>
+              <a:t>▸ VLMPC and our paper's 'warm-start MPPI' baseline do this — μ_p is used, σ_p (or hand-set) is dropped.</a:t>
             </a:r>
           </a:p>
           <a:p>
@@ -12169,7 +12543,7 @@
                 </a:solidFill>
                 <a:latin typeface="Calibri"/>
               </a:rPr>
-              <a:t>▸ σ_p (the prior's own confidence) is thrown away even though it was computed.</a:t>
+              <a:t>▸ PiJEPA does something different: empirical μ_p AND σ_p from N_π diffusion samples, replaces the seed (see slide 13).</a:t>
             </a:r>
           </a:p>
           <a:p>

--- a/prism_jepa_slides.pptx
+++ b/prism_jepa_slides.pptx
@@ -3241,7 +3241,7 @@
                   <a:srgbClr val="222222"/>
                 </a:solidFill>
               </a:rPr>
-              <a:t>Yuhai Wang  •  Northeastern University  •  2026-05-06</a:t>
+              <a:t>Yuhai Wang  •  Northeastern University  •  2026-05-07</a:t>
             </a:r>
           </a:p>
         </p:txBody>
@@ -13236,7 +13236,7 @@
                 </a:solidFill>
                 <a:latin typeface="Calibri"/>
               </a:rPr>
-              <a:t>PRISM-MPPI in one picture</a:t>
+              <a:t>PRISM-MPPI architecture</a:t>
             </a:r>
           </a:p>
         </p:txBody>
@@ -13257,8 +13257,8 @@
         </p:blipFill>
         <p:spPr>
           <a:xfrm>
-            <a:off x="274320" y="1371600"/>
-            <a:ext cx="11612880" cy="3474720"/>
+            <a:off x="137160" y="1097280"/>
+            <a:ext cx="11887200" cy="5120640"/>
           </a:xfrm>
           <a:prstGeom prst="rect">
             <a:avLst/>
@@ -13268,61 +13268,6 @@
       <p:sp>
         <p:nvSpPr>
           <p:cNvPr id="4" name="TextBox 3"/>
-          <p:cNvSpPr txBox="1"/>
-          <p:nvPr/>
-        </p:nvSpPr>
-        <p:spPr>
-          <a:xfrm>
-            <a:off x="457200" y="5212080"/>
-            <a:ext cx="11338560" cy="5120640"/>
-          </a:xfrm>
-          <a:prstGeom prst="rect">
-            <a:avLst/>
-          </a:prstGeom>
-          <a:noFill/>
-        </p:spPr>
-        <p:txBody>
-          <a:bodyPr wrap="square">
-            <a:spAutoFit/>
-          </a:bodyPr>
-          <a:lstStyle/>
-          <a:p>
-            <a:pPr>
-              <a:spcAft>
-                <a:spcPts val="600"/>
-              </a:spcAft>
-            </a:pPr>
-            <a:r>
-              <a:rPr sz="1500">
-                <a:solidFill>
-                  <a:srgbClr val="222222"/>
-                </a:solidFill>
-                <a:latin typeface="Calibri"/>
-              </a:rPr>
-              <a:t>• Frozen JEPA encoder → small MLP prior head → PoG fusion → MPPI loop.</a:t>
-            </a:r>
-          </a:p>
-          <a:p>
-            <a:pPr>
-              <a:spcAft>
-                <a:spcPts val="600"/>
-              </a:spcAft>
-            </a:pPr>
-            <a:r>
-              <a:rPr sz="1500">
-                <a:solidFill>
-                  <a:srgbClr val="222222"/>
-                </a:solidFill>
-                <a:latin typeface="Calibri"/>
-              </a:rPr>
-              <a:t>• Only the prior head is trained; everything else is the LeWM substrate.</a:t>
-            </a:r>
-          </a:p>
-        </p:txBody>
-      </p:sp>
-      <p:sp>
-        <p:nvSpPr>
-          <p:cNvPr id="5" name="TextBox 4"/>
           <p:cNvSpPr txBox="1"/>
           <p:nvPr/>
         </p:nvSpPr>
